--- a/design/Aavaran-Canva-Template.pptx
+++ b/design/Aavaran-Canva-Template.pptx
@@ -21,6 +21,11 @@
     <p:sldId id="269" r:id="rId20"/>
     <p:sldId id="270" r:id="rId21"/>
     <p:sldId id="271" r:id="rId22"/>
+    <p:sldId id="272" r:id="rId23"/>
+    <p:sldId id="273" r:id="rId24"/>
+    <p:sldId id="274" r:id="rId25"/>
+    <p:sldId id="275" r:id="rId26"/>
+    <p:sldId id="276" r:id="rId27"/>
   </p:sldIdLst>
   <p:sldSz cx="7620000" cy="17145000" type="screen4x3"/>
   <p:notesSz cx="6858000" cy="9144000"/>
@@ -3688,7 +3693,7 @@
                 </a:solidFill>
                 <a:latin typeface="Helvetica Neue"/>
               </a:rPr>
-              <a:t>The 13 screens, each on its own page</a:t>
+              <a:t>The 18 screens, each on its own page</a:t>
             </a:r>
           </a:p>
         </p:txBody>
@@ -3721,7 +3726,7 @@
               </a:lnSpc>
             </a:pPr>
             <a:r>
-              <a:rPr sz="1650" b="0">
+              <a:rPr sz="1500" b="0">
                 <a:solidFill>
                   <a:srgbClr val="1A1A1A"/>
                 </a:solidFill>
@@ -3760,7 +3765,7 @@
               </a:lnSpc>
             </a:pPr>
             <a:r>
-              <a:rPr sz="1425" b="0">
+              <a:rPr sz="1275" b="0">
                 <a:solidFill>
                   <a:srgbClr val="6E6E6E"/>
                 </a:solidFill>
@@ -3779,7 +3784,7 @@
         </p:nvSpPr>
         <p:spPr>
           <a:xfrm>
-            <a:off x="342900" y="9772650"/>
+            <a:off x="342900" y="9639300"/>
             <a:ext cx="3619500" cy="323850"/>
           </a:xfrm>
           <a:prstGeom prst="rect">
@@ -3799,7 +3804,7 @@
               </a:lnSpc>
             </a:pPr>
             <a:r>
-              <a:rPr sz="1650" b="0">
+              <a:rPr sz="1500" b="0">
                 <a:solidFill>
                   <a:srgbClr val="1A1A1A"/>
                 </a:solidFill>
@@ -3818,7 +3823,7 @@
         </p:nvSpPr>
         <p:spPr>
           <a:xfrm>
-            <a:off x="4114800" y="9791700"/>
+            <a:off x="4114800" y="9658350"/>
             <a:ext cx="3162300" cy="323850"/>
           </a:xfrm>
           <a:prstGeom prst="rect">
@@ -3838,7 +3843,7 @@
               </a:lnSpc>
             </a:pPr>
             <a:r>
-              <a:rPr sz="1425" b="0">
+              <a:rPr sz="1275" b="0">
                 <a:solidFill>
                   <a:srgbClr val="6E6E6E"/>
                 </a:solidFill>
@@ -3857,7 +3862,7 @@
         </p:nvSpPr>
         <p:spPr>
           <a:xfrm>
-            <a:off x="342900" y="10191750"/>
+            <a:off x="342900" y="9925050"/>
             <a:ext cx="3619500" cy="323850"/>
           </a:xfrm>
           <a:prstGeom prst="rect">
@@ -3877,7 +3882,7 @@
               </a:lnSpc>
             </a:pPr>
             <a:r>
-              <a:rPr sz="1650" b="0">
+              <a:rPr sz="1500" b="0">
                 <a:solidFill>
                   <a:srgbClr val="1A1A1A"/>
                 </a:solidFill>
@@ -3896,7 +3901,7 @@
         </p:nvSpPr>
         <p:spPr>
           <a:xfrm>
-            <a:off x="4114800" y="10210800"/>
+            <a:off x="4114800" y="9944100"/>
             <a:ext cx="3162300" cy="323850"/>
           </a:xfrm>
           <a:prstGeom prst="rect">
@@ -3916,7 +3921,7 @@
               </a:lnSpc>
             </a:pPr>
             <a:r>
-              <a:rPr sz="1425" b="0">
+              <a:rPr sz="1275" b="0">
                 <a:solidFill>
                   <a:srgbClr val="6E6E6E"/>
                 </a:solidFill>
@@ -3935,7 +3940,7 @@
         </p:nvSpPr>
         <p:spPr>
           <a:xfrm>
-            <a:off x="342900" y="10610850"/>
+            <a:off x="342900" y="10210800"/>
             <a:ext cx="3619500" cy="323850"/>
           </a:xfrm>
           <a:prstGeom prst="rect">
@@ -3955,7 +3960,7 @@
               </a:lnSpc>
             </a:pPr>
             <a:r>
-              <a:rPr sz="1650" b="0">
+              <a:rPr sz="1500" b="0">
                 <a:solidFill>
                   <a:srgbClr val="1A1A1A"/>
                 </a:solidFill>
@@ -3974,7 +3979,7 @@
         </p:nvSpPr>
         <p:spPr>
           <a:xfrm>
-            <a:off x="4114800" y="10629900"/>
+            <a:off x="4114800" y="10229850"/>
             <a:ext cx="3162300" cy="323850"/>
           </a:xfrm>
           <a:prstGeom prst="rect">
@@ -3994,7 +3999,7 @@
               </a:lnSpc>
             </a:pPr>
             <a:r>
-              <a:rPr sz="1425" b="0">
+              <a:rPr sz="1275" b="0">
                 <a:solidFill>
                   <a:srgbClr val="6E6E6E"/>
                 </a:solidFill>
@@ -4013,7 +4018,7 @@
         </p:nvSpPr>
         <p:spPr>
           <a:xfrm>
-            <a:off x="342900" y="11029950"/>
+            <a:off x="342900" y="10496550"/>
             <a:ext cx="3619500" cy="323850"/>
           </a:xfrm>
           <a:prstGeom prst="rect">
@@ -4033,7 +4038,7 @@
               </a:lnSpc>
             </a:pPr>
             <a:r>
-              <a:rPr sz="1650" b="0">
+              <a:rPr sz="1500" b="0">
                 <a:solidFill>
                   <a:srgbClr val="1A1A1A"/>
                 </a:solidFill>
@@ -4052,7 +4057,7 @@
         </p:nvSpPr>
         <p:spPr>
           <a:xfrm>
-            <a:off x="4114800" y="11049000"/>
+            <a:off x="4114800" y="10515600"/>
             <a:ext cx="3162300" cy="323850"/>
           </a:xfrm>
           <a:prstGeom prst="rect">
@@ -4072,7 +4077,7 @@
               </a:lnSpc>
             </a:pPr>
             <a:r>
-              <a:rPr sz="1425" b="0">
+              <a:rPr sz="1275" b="0">
                 <a:solidFill>
                   <a:srgbClr val="6E6E6E"/>
                 </a:solidFill>
@@ -4091,7 +4096,7 @@
         </p:nvSpPr>
         <p:spPr>
           <a:xfrm>
-            <a:off x="342900" y="11449050"/>
+            <a:off x="342900" y="10782300"/>
             <a:ext cx="3619500" cy="323850"/>
           </a:xfrm>
           <a:prstGeom prst="rect">
@@ -4111,7 +4116,7 @@
               </a:lnSpc>
             </a:pPr>
             <a:r>
-              <a:rPr sz="1650" b="0">
+              <a:rPr sz="1500" b="0">
                 <a:solidFill>
                   <a:srgbClr val="1A1A1A"/>
                 </a:solidFill>
@@ -4130,7 +4135,7 @@
         </p:nvSpPr>
         <p:spPr>
           <a:xfrm>
-            <a:off x="4114800" y="11468100"/>
+            <a:off x="4114800" y="10801350"/>
             <a:ext cx="3162300" cy="323850"/>
           </a:xfrm>
           <a:prstGeom prst="rect">
@@ -4150,7 +4155,7 @@
               </a:lnSpc>
             </a:pPr>
             <a:r>
-              <a:rPr sz="1425" b="0">
+              <a:rPr sz="1275" b="0">
                 <a:solidFill>
                   <a:srgbClr val="6E6E6E"/>
                 </a:solidFill>
@@ -4169,7 +4174,7 @@
         </p:nvSpPr>
         <p:spPr>
           <a:xfrm>
-            <a:off x="342900" y="11868150"/>
+            <a:off x="342900" y="11068050"/>
             <a:ext cx="3619500" cy="323850"/>
           </a:xfrm>
           <a:prstGeom prst="rect">
@@ -4189,7 +4194,7 @@
               </a:lnSpc>
             </a:pPr>
             <a:r>
-              <a:rPr sz="1650" b="0">
+              <a:rPr sz="1500" b="0">
                 <a:solidFill>
                   <a:srgbClr val="1A1A1A"/>
                 </a:solidFill>
@@ -4208,7 +4213,7 @@
         </p:nvSpPr>
         <p:spPr>
           <a:xfrm>
-            <a:off x="4114800" y="11887200"/>
+            <a:off x="4114800" y="11087100"/>
             <a:ext cx="3162300" cy="323850"/>
           </a:xfrm>
           <a:prstGeom prst="rect">
@@ -4228,7 +4233,7 @@
               </a:lnSpc>
             </a:pPr>
             <a:r>
-              <a:rPr sz="1425" b="0">
+              <a:rPr sz="1275" b="0">
                 <a:solidFill>
                   <a:srgbClr val="6E6E6E"/>
                 </a:solidFill>
@@ -4247,7 +4252,7 @@
         </p:nvSpPr>
         <p:spPr>
           <a:xfrm>
-            <a:off x="342900" y="12287250"/>
+            <a:off x="342900" y="11353800"/>
             <a:ext cx="3619500" cy="323850"/>
           </a:xfrm>
           <a:prstGeom prst="rect">
@@ -4267,7 +4272,7 @@
               </a:lnSpc>
             </a:pPr>
             <a:r>
-              <a:rPr sz="1650" b="0">
+              <a:rPr sz="1500" b="0">
                 <a:solidFill>
                   <a:srgbClr val="1A1A1A"/>
                 </a:solidFill>
@@ -4286,7 +4291,7 @@
         </p:nvSpPr>
         <p:spPr>
           <a:xfrm>
-            <a:off x="4114800" y="12306300"/>
+            <a:off x="4114800" y="11372850"/>
             <a:ext cx="3162300" cy="323850"/>
           </a:xfrm>
           <a:prstGeom prst="rect">
@@ -4306,7 +4311,7 @@
               </a:lnSpc>
             </a:pPr>
             <a:r>
-              <a:rPr sz="1425" b="0">
+              <a:rPr sz="1275" b="0">
                 <a:solidFill>
                   <a:srgbClr val="6E6E6E"/>
                 </a:solidFill>
@@ -4325,7 +4330,7 @@
         </p:nvSpPr>
         <p:spPr>
           <a:xfrm>
-            <a:off x="342900" y="12706350"/>
+            <a:off x="342900" y="11639550"/>
             <a:ext cx="3619500" cy="323850"/>
           </a:xfrm>
           <a:prstGeom prst="rect">
@@ -4345,7 +4350,7 @@
               </a:lnSpc>
             </a:pPr>
             <a:r>
-              <a:rPr sz="1650" b="0">
+              <a:rPr sz="1500" b="0">
                 <a:solidFill>
                   <a:srgbClr val="1A1A1A"/>
                 </a:solidFill>
@@ -4364,7 +4369,7 @@
         </p:nvSpPr>
         <p:spPr>
           <a:xfrm>
-            <a:off x="4114800" y="12725400"/>
+            <a:off x="4114800" y="11658600"/>
             <a:ext cx="3162300" cy="323850"/>
           </a:xfrm>
           <a:prstGeom prst="rect">
@@ -4384,7 +4389,7 @@
               </a:lnSpc>
             </a:pPr>
             <a:r>
-              <a:rPr sz="1425" b="0">
+              <a:rPr sz="1275" b="0">
                 <a:solidFill>
                   <a:srgbClr val="6E6E6E"/>
                 </a:solidFill>
@@ -4403,7 +4408,7 @@
         </p:nvSpPr>
         <p:spPr>
           <a:xfrm>
-            <a:off x="342900" y="13125450"/>
+            <a:off x="342900" y="11925300"/>
             <a:ext cx="3619500" cy="323850"/>
           </a:xfrm>
           <a:prstGeom prst="rect">
@@ -4423,7 +4428,7 @@
               </a:lnSpc>
             </a:pPr>
             <a:r>
-              <a:rPr sz="1650" b="0">
+              <a:rPr sz="1500" b="0">
                 <a:solidFill>
                   <a:srgbClr val="1A1A1A"/>
                 </a:solidFill>
@@ -4442,7 +4447,7 @@
         </p:nvSpPr>
         <p:spPr>
           <a:xfrm>
-            <a:off x="4114800" y="13144500"/>
+            <a:off x="4114800" y="11944350"/>
             <a:ext cx="3162300" cy="323850"/>
           </a:xfrm>
           <a:prstGeom prst="rect">
@@ -4462,7 +4467,7 @@
               </a:lnSpc>
             </a:pPr>
             <a:r>
-              <a:rPr sz="1425" b="0">
+              <a:rPr sz="1275" b="0">
                 <a:solidFill>
                   <a:srgbClr val="6E6E6E"/>
                 </a:solidFill>
@@ -4481,7 +4486,7 @@
         </p:nvSpPr>
         <p:spPr>
           <a:xfrm>
-            <a:off x="342900" y="13544550"/>
+            <a:off x="342900" y="12211050"/>
             <a:ext cx="3619500" cy="323850"/>
           </a:xfrm>
           <a:prstGeom prst="rect">
@@ -4501,7 +4506,7 @@
               </a:lnSpc>
             </a:pPr>
             <a:r>
-              <a:rPr sz="1650" b="0">
+              <a:rPr sz="1500" b="0">
                 <a:solidFill>
                   <a:srgbClr val="1A1A1A"/>
                 </a:solidFill>
@@ -4520,7 +4525,7 @@
         </p:nvSpPr>
         <p:spPr>
           <a:xfrm>
-            <a:off x="4114800" y="13563600"/>
+            <a:off x="4114800" y="12230100"/>
             <a:ext cx="3162300" cy="323850"/>
           </a:xfrm>
           <a:prstGeom prst="rect">
@@ -4540,7 +4545,7 @@
               </a:lnSpc>
             </a:pPr>
             <a:r>
-              <a:rPr sz="1425" b="0">
+              <a:rPr sz="1275" b="0">
                 <a:solidFill>
                   <a:srgbClr val="6E6E6E"/>
                 </a:solidFill>
@@ -4559,7 +4564,7 @@
         </p:nvSpPr>
         <p:spPr>
           <a:xfrm>
-            <a:off x="342900" y="13963650"/>
+            <a:off x="342900" y="12496800"/>
             <a:ext cx="3619500" cy="323850"/>
           </a:xfrm>
           <a:prstGeom prst="rect">
@@ -4579,7 +4584,7 @@
               </a:lnSpc>
             </a:pPr>
             <a:r>
-              <a:rPr sz="1650" b="0">
+              <a:rPr sz="1500" b="0">
                 <a:solidFill>
                   <a:srgbClr val="1A1A1A"/>
                 </a:solidFill>
@@ -4598,7 +4603,7 @@
         </p:nvSpPr>
         <p:spPr>
           <a:xfrm>
-            <a:off x="4114800" y="13982700"/>
+            <a:off x="4114800" y="12515850"/>
             <a:ext cx="3162300" cy="323850"/>
           </a:xfrm>
           <a:prstGeom prst="rect">
@@ -4618,7 +4623,7 @@
               </a:lnSpc>
             </a:pPr>
             <a:r>
-              <a:rPr sz="1425" b="0">
+              <a:rPr sz="1275" b="0">
                 <a:solidFill>
                   <a:srgbClr val="6E6E6E"/>
                 </a:solidFill>
@@ -4637,7 +4642,7 @@
         </p:nvSpPr>
         <p:spPr>
           <a:xfrm>
-            <a:off x="342900" y="14382750"/>
+            <a:off x="342900" y="12782550"/>
             <a:ext cx="3619500" cy="323850"/>
           </a:xfrm>
           <a:prstGeom prst="rect">
@@ -4657,7 +4662,7 @@
               </a:lnSpc>
             </a:pPr>
             <a:r>
-              <a:rPr sz="1650" b="0">
+              <a:rPr sz="1500" b="0">
                 <a:solidFill>
                   <a:srgbClr val="1A1A1A"/>
                 </a:solidFill>
@@ -4676,7 +4681,7 @@
         </p:nvSpPr>
         <p:spPr>
           <a:xfrm>
-            <a:off x="4114800" y="14401800"/>
+            <a:off x="4114800" y="12801600"/>
             <a:ext cx="3162300" cy="323850"/>
           </a:xfrm>
           <a:prstGeom prst="rect">
@@ -4696,7 +4701,7 @@
               </a:lnSpc>
             </a:pPr>
             <a:r>
-              <a:rPr sz="1425" b="0">
+              <a:rPr sz="1275" b="0">
                 <a:solidFill>
                   <a:srgbClr val="6E6E6E"/>
                 </a:solidFill>
@@ -4715,7 +4720,397 @@
         </p:nvSpPr>
         <p:spPr>
           <a:xfrm>
-            <a:off x="342900" y="15182850"/>
+            <a:off x="342900" y="13068300"/>
+            <a:ext cx="3619500" cy="323850"/>
+          </a:xfrm>
+          <a:prstGeom prst="rect">
+            <a:avLst/>
+          </a:prstGeom>
+          <a:noFill/>
+        </p:spPr>
+        <p:txBody>
+          <a:bodyPr wrap="square" lIns="0" rIns="0" tIns="0" bIns="0">
+            <a:spAutoFit/>
+          </a:bodyPr>
+          <a:lstStyle/>
+          <a:p>
+            <a:pPr algn="l">
+              <a:lnSpc>
+                <a:spcPct val="145000"/>
+              </a:lnSpc>
+            </a:pPr>
+            <a:r>
+              <a:rPr sz="1500" b="0">
+                <a:solidFill>
+                  <a:srgbClr val="1A1A1A"/>
+                </a:solidFill>
+                <a:latin typeface="Menlo"/>
+              </a:rPr>
+              <a:t>13-server-version-stale</a:t>
+            </a:r>
+          </a:p>
+        </p:txBody>
+      </p:sp>
+      <p:sp>
+        <p:nvSpPr>
+          <p:cNvPr id="44" name="TextBox 43"/>
+          <p:cNvSpPr txBox="1"/>
+          <p:nvPr/>
+        </p:nvSpPr>
+        <p:spPr>
+          <a:xfrm>
+            <a:off x="4114800" y="13087350"/>
+            <a:ext cx="3162300" cy="323850"/>
+          </a:xfrm>
+          <a:prstGeom prst="rect">
+            <a:avLst/>
+          </a:prstGeom>
+          <a:noFill/>
+        </p:spPr>
+        <p:txBody>
+          <a:bodyPr wrap="square" lIns="0" rIns="0" tIns="0" bIns="0">
+            <a:spAutoFit/>
+          </a:bodyPr>
+          <a:lstStyle/>
+          <a:p>
+            <a:pPr algn="l">
+              <a:lnSpc>
+                <a:spcPct val="145000"/>
+              </a:lnSpc>
+            </a:pPr>
+            <a:r>
+              <a:rPr sz="1275" b="0">
+                <a:solidFill>
+                  <a:srgbClr val="6E6E6E"/>
+                </a:solidFill>
+                <a:latin typeface="Helvetica Neue"/>
+              </a:rPr>
+              <a:t>server older than the extension</a:t>
+            </a:r>
+          </a:p>
+        </p:txBody>
+      </p:sp>
+      <p:sp>
+        <p:nvSpPr>
+          <p:cNvPr id="45" name="TextBox 44"/>
+          <p:cNvSpPr txBox="1"/>
+          <p:nvPr/>
+        </p:nvSpPr>
+        <p:spPr>
+          <a:xfrm>
+            <a:off x="342900" y="13354050"/>
+            <a:ext cx="3619500" cy="323850"/>
+          </a:xfrm>
+          <a:prstGeom prst="rect">
+            <a:avLst/>
+          </a:prstGeom>
+          <a:noFill/>
+        </p:spPr>
+        <p:txBody>
+          <a:bodyPr wrap="square" lIns="0" rIns="0" tIns="0" bIns="0">
+            <a:spAutoFit/>
+          </a:bodyPr>
+          <a:lstStyle/>
+          <a:p>
+            <a:pPr algn="l">
+              <a:lnSpc>
+                <a:spcPct val="145000"/>
+              </a:lnSpc>
+            </a:pPr>
+            <a:r>
+              <a:rPr sz="1500" b="0">
+                <a:solidFill>
+                  <a:srgbClr val="1A1A1A"/>
+                </a:solidFill>
+                <a:latin typeface="Menlo"/>
+              </a:rPr>
+              <a:t>14-needs-user-input</a:t>
+            </a:r>
+          </a:p>
+        </p:txBody>
+      </p:sp>
+      <p:sp>
+        <p:nvSpPr>
+          <p:cNvPr id="46" name="TextBox 45"/>
+          <p:cNvSpPr txBox="1"/>
+          <p:nvPr/>
+        </p:nvSpPr>
+        <p:spPr>
+          <a:xfrm>
+            <a:off x="4114800" y="13373100"/>
+            <a:ext cx="3162300" cy="323850"/>
+          </a:xfrm>
+          <a:prstGeom prst="rect">
+            <a:avLst/>
+          </a:prstGeom>
+          <a:noFill/>
+        </p:spPr>
+        <p:txBody>
+          <a:bodyPr wrap="square" lIns="0" rIns="0" tIns="0" bIns="0">
+            <a:spAutoFit/>
+          </a:bodyPr>
+          <a:lstStyle/>
+          <a:p>
+            <a:pPr algn="l">
+              <a:lnSpc>
+                <a:spcPct val="145000"/>
+              </a:lnSpc>
+            </a:pPr>
+            <a:r>
+              <a:rPr sz="1275" b="0">
+                <a:solidFill>
+                  <a:srgbClr val="6E6E6E"/>
+                </a:solidFill>
+                <a:latin typeface="Helvetica Neue"/>
+              </a:rPr>
+              <a:t>it asks you for one value</a:t>
+            </a:r>
+          </a:p>
+        </p:txBody>
+      </p:sp>
+      <p:sp>
+        <p:nvSpPr>
+          <p:cNvPr id="47" name="TextBox 46"/>
+          <p:cNvSpPr txBox="1"/>
+          <p:nvPr/>
+        </p:nvSpPr>
+        <p:spPr>
+          <a:xfrm>
+            <a:off x="342900" y="13639800"/>
+            <a:ext cx="3619500" cy="323850"/>
+          </a:xfrm>
+          <a:prstGeom prst="rect">
+            <a:avLst/>
+          </a:prstGeom>
+          <a:noFill/>
+        </p:spPr>
+        <p:txBody>
+          <a:bodyPr wrap="square" lIns="0" rIns="0" tIns="0" bIns="0">
+            <a:spAutoFit/>
+          </a:bodyPr>
+          <a:lstStyle/>
+          <a:p>
+            <a:pPr algn="l">
+              <a:lnSpc>
+                <a:spcPct val="145000"/>
+              </a:lnSpc>
+            </a:pPr>
+            <a:r>
+              <a:rPr sz="1500" b="0">
+                <a:solidFill>
+                  <a:srgbClr val="1A1A1A"/>
+                </a:solidFill>
+                <a:latin typeface="Menlo"/>
+              </a:rPr>
+              <a:t>15-thread-resume</a:t>
+            </a:r>
+          </a:p>
+        </p:txBody>
+      </p:sp>
+      <p:sp>
+        <p:nvSpPr>
+          <p:cNvPr id="48" name="TextBox 47"/>
+          <p:cNvSpPr txBox="1"/>
+          <p:nvPr/>
+        </p:nvSpPr>
+        <p:spPr>
+          <a:xfrm>
+            <a:off x="4114800" y="13658850"/>
+            <a:ext cx="3162300" cy="323850"/>
+          </a:xfrm>
+          <a:prstGeom prst="rect">
+            <a:avLst/>
+          </a:prstGeom>
+          <a:noFill/>
+        </p:spPr>
+        <p:txBody>
+          <a:bodyPr wrap="square" lIns="0" rIns="0" tIns="0" bIns="0">
+            <a:spAutoFit/>
+          </a:bodyPr>
+          <a:lstStyle/>
+          <a:p>
+            <a:pPr algn="l">
+              <a:lnSpc>
+                <a:spcPct val="145000"/>
+              </a:lnSpc>
+            </a:pPr>
+            <a:r>
+              <a:rPr sz="1275" b="0">
+                <a:solidFill>
+                  <a:srgbClr val="6E6E6E"/>
+                </a:solidFill>
+                <a:latin typeface="Helvetica Neue"/>
+              </a:rPr>
+              <a:t>you have been on this site before</a:t>
+            </a:r>
+          </a:p>
+        </p:txBody>
+      </p:sp>
+      <p:sp>
+        <p:nvSpPr>
+          <p:cNvPr id="49" name="TextBox 48"/>
+          <p:cNvSpPr txBox="1"/>
+          <p:nvPr/>
+        </p:nvSpPr>
+        <p:spPr>
+          <a:xfrm>
+            <a:off x="342900" y="13925550"/>
+            <a:ext cx="3619500" cy="323850"/>
+          </a:xfrm>
+          <a:prstGeom prst="rect">
+            <a:avLst/>
+          </a:prstGeom>
+          <a:noFill/>
+        </p:spPr>
+        <p:txBody>
+          <a:bodyPr wrap="square" lIns="0" rIns="0" tIns="0" bIns="0">
+            <a:spAutoFit/>
+          </a:bodyPr>
+          <a:lstStyle/>
+          <a:p>
+            <a:pPr algn="l">
+              <a:lnSpc>
+                <a:spcPct val="145000"/>
+              </a:lnSpc>
+            </a:pPr>
+            <a:r>
+              <a:rPr sz="1500" b="0">
+                <a:solidFill>
+                  <a:srgbClr val="1A1A1A"/>
+                </a:solidFill>
+                <a:latin typeface="Menlo"/>
+              </a:rPr>
+              <a:t>16-thread-new</a:t>
+            </a:r>
+          </a:p>
+        </p:txBody>
+      </p:sp>
+      <p:sp>
+        <p:nvSpPr>
+          <p:cNvPr id="50" name="TextBox 49"/>
+          <p:cNvSpPr txBox="1"/>
+          <p:nvPr/>
+        </p:nvSpPr>
+        <p:spPr>
+          <a:xfrm>
+            <a:off x="4114800" y="13944600"/>
+            <a:ext cx="3162300" cy="323850"/>
+          </a:xfrm>
+          <a:prstGeom prst="rect">
+            <a:avLst/>
+          </a:prstGeom>
+          <a:noFill/>
+        </p:spPr>
+        <p:txBody>
+          <a:bodyPr wrap="square" lIns="0" rIns="0" tIns="0" bIns="0">
+            <a:spAutoFit/>
+          </a:bodyPr>
+          <a:lstStyle/>
+          <a:p>
+            <a:pPr algn="l">
+              <a:lnSpc>
+                <a:spcPct val="145000"/>
+              </a:lnSpc>
+            </a:pPr>
+            <a:r>
+              <a:rPr sz="1275" b="0">
+                <a:solidFill>
+                  <a:srgbClr val="6E6E6E"/>
+                </a:solidFill>
+                <a:latin typeface="Helvetica Neue"/>
+              </a:rPr>
+              <a:t>a fresh site, no history</a:t>
+            </a:r>
+          </a:p>
+        </p:txBody>
+      </p:sp>
+      <p:sp>
+        <p:nvSpPr>
+          <p:cNvPr id="51" name="TextBox 50"/>
+          <p:cNvSpPr txBox="1"/>
+          <p:nvPr/>
+        </p:nvSpPr>
+        <p:spPr>
+          <a:xfrm>
+            <a:off x="342900" y="14211300"/>
+            <a:ext cx="3619500" cy="323850"/>
+          </a:xfrm>
+          <a:prstGeom prst="rect">
+            <a:avLst/>
+          </a:prstGeom>
+          <a:noFill/>
+        </p:spPr>
+        <p:txBody>
+          <a:bodyPr wrap="square" lIns="0" rIns="0" tIns="0" bIns="0">
+            <a:spAutoFit/>
+          </a:bodyPr>
+          <a:lstStyle/>
+          <a:p>
+            <a:pPr algn="l">
+              <a:lnSpc>
+                <a:spcPct val="145000"/>
+              </a:lnSpc>
+            </a:pPr>
+            <a:r>
+              <a:rPr sz="1500" b="0">
+                <a:solidFill>
+                  <a:srgbClr val="1A1A1A"/>
+                </a:solidFill>
+                <a:latin typeface="Menlo"/>
+              </a:rPr>
+              <a:t>17-server-came-up</a:t>
+            </a:r>
+          </a:p>
+        </p:txBody>
+      </p:sp>
+      <p:sp>
+        <p:nvSpPr>
+          <p:cNvPr id="52" name="TextBox 51"/>
+          <p:cNvSpPr txBox="1"/>
+          <p:nvPr/>
+        </p:nvSpPr>
+        <p:spPr>
+          <a:xfrm>
+            <a:off x="4114800" y="14230350"/>
+            <a:ext cx="3162300" cy="323850"/>
+          </a:xfrm>
+          <a:prstGeom prst="rect">
+            <a:avLst/>
+          </a:prstGeom>
+          <a:noFill/>
+        </p:spPr>
+        <p:txBody>
+          <a:bodyPr wrap="square" lIns="0" rIns="0" tIns="0" bIns="0">
+            <a:spAutoFit/>
+          </a:bodyPr>
+          <a:lstStyle/>
+          <a:p>
+            <a:pPr algn="l">
+              <a:lnSpc>
+                <a:spcPct val="145000"/>
+              </a:lnSpc>
+            </a:pPr>
+            <a:r>
+              <a:rPr sz="1275" b="0">
+                <a:solidFill>
+                  <a:srgbClr val="6E6E6E"/>
+                </a:solidFill>
+                <a:latin typeface="Helvetica Neue"/>
+              </a:rPr>
+              <a:t>it noticed the server start</a:t>
+            </a:r>
+          </a:p>
+        </p:txBody>
+      </p:sp>
+      <p:sp>
+        <p:nvSpPr>
+          <p:cNvPr id="53" name="TextBox 52"/>
+          <p:cNvSpPr txBox="1"/>
+          <p:nvPr/>
+        </p:nvSpPr>
+        <p:spPr>
+          <a:xfrm>
+            <a:off x="342900" y="14878050"/>
             <a:ext cx="6934200" cy="1143000"/>
           </a:xfrm>
           <a:prstGeom prst="rect">
@@ -4748,7 +5143,7 @@
       </p:sp>
       <p:sp>
         <p:nvSpPr>
-          <p:cNvPr id="44" name="TextBox 43"/>
+          <p:cNvPr id="54" name="TextBox 53"/>
           <p:cNvSpPr txBox="1"/>
           <p:nvPr/>
         </p:nvSpPr>
@@ -6899,7 +7294,130 @@
       </p:sp>
       <p:sp>
         <p:nvSpPr>
-          <p:cNvPr id="5" name="TextBox 4"/>
+          <p:cNvPr id="5" name="Rectangle 4"/>
+          <p:cNvSpPr/>
+          <p:nvPr/>
+        </p:nvSpPr>
+        <p:spPr>
+          <a:xfrm>
+            <a:off x="0" y="914400"/>
+            <a:ext cx="7620000" cy="9525"/>
+          </a:xfrm>
+          <a:prstGeom prst="rect">
+            <a:avLst/>
+          </a:prstGeom>
+          <a:solidFill>
+            <a:srgbClr val="D9D9D9"/>
+          </a:solidFill>
+          <a:ln>
+            <a:noFill/>
+            <a:prstDash val="dash"/>
+          </a:ln>
+          <a:effectLst/>
+        </p:spPr>
+        <p:style>
+          <a:lnRef idx="1">
+            <a:schemeClr val="accent1"/>
+          </a:lnRef>
+          <a:fillRef idx="3">
+            <a:schemeClr val="accent1"/>
+          </a:fillRef>
+          <a:effectRef idx="2">
+            <a:schemeClr val="accent1"/>
+          </a:effectRef>
+          <a:fontRef idx="minor">
+            <a:schemeClr val="lt1"/>
+          </a:fontRef>
+        </p:style>
+        <p:txBody>
+          <a:bodyPr rtlCol="0" anchor="ctr"/>
+          <a:lstStyle/>
+          <a:p>
+            <a:pPr algn="ctr"/>
+          </a:p>
+        </p:txBody>
+      </p:sp>
+      <p:sp>
+        <p:nvSpPr>
+          <p:cNvPr id="6" name="TextBox 5"/>
+          <p:cNvSpPr txBox="1"/>
+          <p:nvPr/>
+        </p:nvSpPr>
+        <p:spPr>
+          <a:xfrm>
+            <a:off x="438150" y="152400"/>
+            <a:ext cx="3810000" cy="285750"/>
+          </a:xfrm>
+          <a:prstGeom prst="rect">
+            <a:avLst/>
+          </a:prstGeom>
+          <a:noFill/>
+        </p:spPr>
+        <p:txBody>
+          <a:bodyPr wrap="square" lIns="0" rIns="0" tIns="0" bIns="0">
+            <a:spAutoFit/>
+          </a:bodyPr>
+          <a:lstStyle/>
+          <a:p>
+            <a:pPr algn="l">
+              <a:lnSpc>
+                <a:spcPct val="145000"/>
+              </a:lnSpc>
+            </a:pPr>
+            <a:r>
+              <a:rPr sz="1350" b="0">
+                <a:solidFill>
+                  <a:srgbClr val="A6A6A6"/>
+                </a:solidFill>
+                <a:latin typeface="Menlo"/>
+              </a:rPr>
+              <a:t>36 px</a:t>
+            </a:r>
+          </a:p>
+        </p:txBody>
+      </p:sp>
+      <p:sp>
+        <p:nvSpPr>
+          <p:cNvPr id="7" name="TextBox 6"/>
+          <p:cNvSpPr txBox="1"/>
+          <p:nvPr/>
+        </p:nvSpPr>
+        <p:spPr>
+          <a:xfrm>
+            <a:off x="438150" y="1009650"/>
+            <a:ext cx="3810000" cy="285750"/>
+          </a:xfrm>
+          <a:prstGeom prst="rect">
+            <a:avLst/>
+          </a:prstGeom>
+          <a:noFill/>
+        </p:spPr>
+        <p:txBody>
+          <a:bodyPr wrap="square" lIns="0" rIns="0" tIns="0" bIns="0">
+            <a:spAutoFit/>
+          </a:bodyPr>
+          <a:lstStyle/>
+          <a:p>
+            <a:pPr algn="l">
+              <a:lnSpc>
+                <a:spcPct val="145000"/>
+              </a:lnSpc>
+            </a:pPr>
+            <a:r>
+              <a:rPr sz="1350" b="0">
+                <a:solidFill>
+                  <a:srgbClr val="A6A6A6"/>
+                </a:solidFill>
+                <a:latin typeface="Menlo"/>
+              </a:rPr>
+              <a:t>top bar ends at 96</a:t>
+            </a:r>
+          </a:p>
+        </p:txBody>
+      </p:sp>
+      <p:sp>
+        <p:nvSpPr>
+          <p:cNvPr id="8" name="TextBox 7"/>
           <p:cNvSpPr txBox="1"/>
           <p:nvPr/>
         </p:nvSpPr>
@@ -6931,7 +7449,85 @@
                 </a:solidFill>
                 <a:latin typeface="Menlo"/>
               </a:rPr>
-              <a:t>spare-1</a:t>
+              <a:t>13-server-version-stale</a:t>
+            </a:r>
+          </a:p>
+        </p:txBody>
+      </p:sp>
+      <p:sp>
+        <p:nvSpPr>
+          <p:cNvPr id="9" name="TextBox 8"/>
+          <p:cNvSpPr txBox="1"/>
+          <p:nvPr/>
+        </p:nvSpPr>
+        <p:spPr>
+          <a:xfrm>
+            <a:off x="342900" y="16554450"/>
+            <a:ext cx="6934200" cy="323850"/>
+          </a:xfrm>
+          <a:prstGeom prst="rect">
+            <a:avLst/>
+          </a:prstGeom>
+          <a:noFill/>
+        </p:spPr>
+        <p:txBody>
+          <a:bodyPr wrap="square" lIns="0" rIns="0" tIns="0" bIns="0">
+            <a:spAutoFit/>
+          </a:bodyPr>
+          <a:lstStyle/>
+          <a:p>
+            <a:pPr algn="l">
+              <a:lnSpc>
+                <a:spcPct val="145000"/>
+              </a:lnSpc>
+            </a:pPr>
+            <a:r>
+              <a:rPr sz="1500" b="0">
+                <a:solidFill>
+                  <a:srgbClr val="A6A6A6"/>
+                </a:solidFill>
+                <a:latin typeface="Helvetica Neue"/>
+              </a:rPr>
+              <a:t>server older than the extension</a:t>
+            </a:r>
+          </a:p>
+        </p:txBody>
+      </p:sp>
+      <p:sp>
+        <p:nvSpPr>
+          <p:cNvPr id="10" name="TextBox 9"/>
+          <p:cNvSpPr txBox="1"/>
+          <p:nvPr/>
+        </p:nvSpPr>
+        <p:spPr>
+          <a:xfrm>
+            <a:off x="5372100" y="16230600"/>
+            <a:ext cx="1905000" cy="323850"/>
+          </a:xfrm>
+          <a:prstGeom prst="rect">
+            <a:avLst/>
+          </a:prstGeom>
+          <a:noFill/>
+        </p:spPr>
+        <p:txBody>
+          <a:bodyPr wrap="square" lIns="0" rIns="0" tIns="0" bIns="0">
+            <a:spAutoFit/>
+          </a:bodyPr>
+          <a:lstStyle/>
+          <a:p>
+            <a:pPr algn="r">
+              <a:lnSpc>
+                <a:spcPct val="145000"/>
+              </a:lnSpc>
+            </a:pPr>
+            <a:r>
+              <a:rPr sz="1350" b="0">
+                <a:solidFill>
+                  <a:srgbClr val="A6A6A6"/>
+                </a:solidFill>
+                <a:latin typeface="Menlo"/>
+              </a:rPr>
+              <a:t>800 × 1800</a:t>
             </a:r>
           </a:p>
         </p:txBody>
@@ -7090,7 +7686,130 @@
       </p:sp>
       <p:sp>
         <p:nvSpPr>
-          <p:cNvPr id="5" name="TextBox 4"/>
+          <p:cNvPr id="5" name="Rectangle 4"/>
+          <p:cNvSpPr/>
+          <p:nvPr/>
+        </p:nvSpPr>
+        <p:spPr>
+          <a:xfrm>
+            <a:off x="0" y="914400"/>
+            <a:ext cx="7620000" cy="9525"/>
+          </a:xfrm>
+          <a:prstGeom prst="rect">
+            <a:avLst/>
+          </a:prstGeom>
+          <a:solidFill>
+            <a:srgbClr val="D9D9D9"/>
+          </a:solidFill>
+          <a:ln>
+            <a:noFill/>
+            <a:prstDash val="dash"/>
+          </a:ln>
+          <a:effectLst/>
+        </p:spPr>
+        <p:style>
+          <a:lnRef idx="1">
+            <a:schemeClr val="accent1"/>
+          </a:lnRef>
+          <a:fillRef idx="3">
+            <a:schemeClr val="accent1"/>
+          </a:fillRef>
+          <a:effectRef idx="2">
+            <a:schemeClr val="accent1"/>
+          </a:effectRef>
+          <a:fontRef idx="minor">
+            <a:schemeClr val="lt1"/>
+          </a:fontRef>
+        </p:style>
+        <p:txBody>
+          <a:bodyPr rtlCol="0" anchor="ctr"/>
+          <a:lstStyle/>
+          <a:p>
+            <a:pPr algn="ctr"/>
+          </a:p>
+        </p:txBody>
+      </p:sp>
+      <p:sp>
+        <p:nvSpPr>
+          <p:cNvPr id="6" name="TextBox 5"/>
+          <p:cNvSpPr txBox="1"/>
+          <p:nvPr/>
+        </p:nvSpPr>
+        <p:spPr>
+          <a:xfrm>
+            <a:off x="438150" y="152400"/>
+            <a:ext cx="3810000" cy="285750"/>
+          </a:xfrm>
+          <a:prstGeom prst="rect">
+            <a:avLst/>
+          </a:prstGeom>
+          <a:noFill/>
+        </p:spPr>
+        <p:txBody>
+          <a:bodyPr wrap="square" lIns="0" rIns="0" tIns="0" bIns="0">
+            <a:spAutoFit/>
+          </a:bodyPr>
+          <a:lstStyle/>
+          <a:p>
+            <a:pPr algn="l">
+              <a:lnSpc>
+                <a:spcPct val="145000"/>
+              </a:lnSpc>
+            </a:pPr>
+            <a:r>
+              <a:rPr sz="1350" b="0">
+                <a:solidFill>
+                  <a:srgbClr val="A6A6A6"/>
+                </a:solidFill>
+                <a:latin typeface="Menlo"/>
+              </a:rPr>
+              <a:t>36 px</a:t>
+            </a:r>
+          </a:p>
+        </p:txBody>
+      </p:sp>
+      <p:sp>
+        <p:nvSpPr>
+          <p:cNvPr id="7" name="TextBox 6"/>
+          <p:cNvSpPr txBox="1"/>
+          <p:nvPr/>
+        </p:nvSpPr>
+        <p:spPr>
+          <a:xfrm>
+            <a:off x="438150" y="1009650"/>
+            <a:ext cx="3810000" cy="285750"/>
+          </a:xfrm>
+          <a:prstGeom prst="rect">
+            <a:avLst/>
+          </a:prstGeom>
+          <a:noFill/>
+        </p:spPr>
+        <p:txBody>
+          <a:bodyPr wrap="square" lIns="0" rIns="0" tIns="0" bIns="0">
+            <a:spAutoFit/>
+          </a:bodyPr>
+          <a:lstStyle/>
+          <a:p>
+            <a:pPr algn="l">
+              <a:lnSpc>
+                <a:spcPct val="145000"/>
+              </a:lnSpc>
+            </a:pPr>
+            <a:r>
+              <a:rPr sz="1350" b="0">
+                <a:solidFill>
+                  <a:srgbClr val="A6A6A6"/>
+                </a:solidFill>
+                <a:latin typeface="Menlo"/>
+              </a:rPr>
+              <a:t>top bar ends at 96</a:t>
+            </a:r>
+          </a:p>
+        </p:txBody>
+      </p:sp>
+      <p:sp>
+        <p:nvSpPr>
+          <p:cNvPr id="8" name="TextBox 7"/>
           <p:cNvSpPr txBox="1"/>
           <p:nvPr/>
         </p:nvSpPr>
@@ -7122,7 +7841,1261 @@
                 </a:solidFill>
                 <a:latin typeface="Menlo"/>
               </a:rPr>
-              <a:t>spare-2</a:t>
+              <a:t>14-needs-user-input</a:t>
+            </a:r>
+          </a:p>
+        </p:txBody>
+      </p:sp>
+      <p:sp>
+        <p:nvSpPr>
+          <p:cNvPr id="9" name="TextBox 8"/>
+          <p:cNvSpPr txBox="1"/>
+          <p:nvPr/>
+        </p:nvSpPr>
+        <p:spPr>
+          <a:xfrm>
+            <a:off x="342900" y="16554450"/>
+            <a:ext cx="6934200" cy="323850"/>
+          </a:xfrm>
+          <a:prstGeom prst="rect">
+            <a:avLst/>
+          </a:prstGeom>
+          <a:noFill/>
+        </p:spPr>
+        <p:txBody>
+          <a:bodyPr wrap="square" lIns="0" rIns="0" tIns="0" bIns="0">
+            <a:spAutoFit/>
+          </a:bodyPr>
+          <a:lstStyle/>
+          <a:p>
+            <a:pPr algn="l">
+              <a:lnSpc>
+                <a:spcPct val="145000"/>
+              </a:lnSpc>
+            </a:pPr>
+            <a:r>
+              <a:rPr sz="1500" b="0">
+                <a:solidFill>
+                  <a:srgbClr val="A6A6A6"/>
+                </a:solidFill>
+                <a:latin typeface="Helvetica Neue"/>
+              </a:rPr>
+              <a:t>it asks you for one value</a:t>
+            </a:r>
+          </a:p>
+        </p:txBody>
+      </p:sp>
+      <p:sp>
+        <p:nvSpPr>
+          <p:cNvPr id="10" name="TextBox 9"/>
+          <p:cNvSpPr txBox="1"/>
+          <p:nvPr/>
+        </p:nvSpPr>
+        <p:spPr>
+          <a:xfrm>
+            <a:off x="5372100" y="16230600"/>
+            <a:ext cx="1905000" cy="323850"/>
+          </a:xfrm>
+          <a:prstGeom prst="rect">
+            <a:avLst/>
+          </a:prstGeom>
+          <a:noFill/>
+        </p:spPr>
+        <p:txBody>
+          <a:bodyPr wrap="square" lIns="0" rIns="0" tIns="0" bIns="0">
+            <a:spAutoFit/>
+          </a:bodyPr>
+          <a:lstStyle/>
+          <a:p>
+            <a:pPr algn="r">
+              <a:lnSpc>
+                <a:spcPct val="145000"/>
+              </a:lnSpc>
+            </a:pPr>
+            <a:r>
+              <a:rPr sz="1350" b="0">
+                <a:solidFill>
+                  <a:srgbClr val="A6A6A6"/>
+                </a:solidFill>
+                <a:latin typeface="Menlo"/>
+              </a:rPr>
+              <a:t>800 × 1800</a:t>
+            </a:r>
+          </a:p>
+        </p:txBody>
+      </p:sp>
+    </p:spTree>
+  </p:cSld>
+  <p:clrMapOvr>
+    <a:masterClrMapping/>
+  </p:clrMapOvr>
+</p:sld>
+</file>
+
+<file path=ppt/slides/slide17.xml><?xml version="1.0" encoding="utf-8"?>
+<p:sld xmlns:a="http://schemas.openxmlformats.org/drawingml/2006/main" xmlns:p="http://schemas.openxmlformats.org/presentationml/2006/main" xmlns:r="http://schemas.openxmlformats.org/officeDocument/2006/relationships">
+  <p:cSld>
+    <p:spTree>
+      <p:nvGrpSpPr>
+        <p:cNvPr id="1" name=""/>
+        <p:cNvGrpSpPr/>
+        <p:nvPr/>
+      </p:nvGrpSpPr>
+      <p:grpSpPr/>
+      <p:sp>
+        <p:nvSpPr>
+          <p:cNvPr id="2" name="Rectangle 1"/>
+          <p:cNvSpPr/>
+          <p:nvPr/>
+        </p:nvSpPr>
+        <p:spPr>
+          <a:xfrm>
+            <a:off x="0" y="0"/>
+            <a:ext cx="7620000" cy="17145000"/>
+          </a:xfrm>
+          <a:prstGeom prst="rect">
+            <a:avLst/>
+          </a:prstGeom>
+          <a:solidFill>
+            <a:srgbClr val="FFFFFF"/>
+          </a:solidFill>
+          <a:ln>
+            <a:noFill/>
+          </a:ln>
+          <a:effectLst/>
+        </p:spPr>
+        <p:style>
+          <a:lnRef idx="1">
+            <a:schemeClr val="accent1"/>
+          </a:lnRef>
+          <a:fillRef idx="3">
+            <a:schemeClr val="accent1"/>
+          </a:fillRef>
+          <a:effectRef idx="2">
+            <a:schemeClr val="accent1"/>
+          </a:effectRef>
+          <a:fontRef idx="minor">
+            <a:schemeClr val="lt1"/>
+          </a:fontRef>
+        </p:style>
+        <p:txBody>
+          <a:bodyPr rtlCol="0" anchor="ctr"/>
+          <a:lstStyle/>
+          <a:p>
+            <a:pPr algn="ctr"/>
+          </a:p>
+        </p:txBody>
+      </p:sp>
+      <p:sp>
+        <p:nvSpPr>
+          <p:cNvPr id="3" name="Rectangle 2"/>
+          <p:cNvSpPr/>
+          <p:nvPr/>
+        </p:nvSpPr>
+        <p:spPr>
+          <a:xfrm>
+            <a:off x="342900" y="0"/>
+            <a:ext cx="9525" cy="17145000"/>
+          </a:xfrm>
+          <a:prstGeom prst="rect">
+            <a:avLst/>
+          </a:prstGeom>
+          <a:solidFill>
+            <a:srgbClr val="D9D9D9"/>
+          </a:solidFill>
+          <a:ln>
+            <a:noFill/>
+            <a:prstDash val="dash"/>
+          </a:ln>
+          <a:effectLst/>
+        </p:spPr>
+        <p:style>
+          <a:lnRef idx="1">
+            <a:schemeClr val="accent1"/>
+          </a:lnRef>
+          <a:fillRef idx="3">
+            <a:schemeClr val="accent1"/>
+          </a:fillRef>
+          <a:effectRef idx="2">
+            <a:schemeClr val="accent1"/>
+          </a:effectRef>
+          <a:fontRef idx="minor">
+            <a:schemeClr val="lt1"/>
+          </a:fontRef>
+        </p:style>
+        <p:txBody>
+          <a:bodyPr rtlCol="0" anchor="ctr"/>
+          <a:lstStyle/>
+          <a:p>
+            <a:pPr algn="ctr"/>
+          </a:p>
+        </p:txBody>
+      </p:sp>
+      <p:sp>
+        <p:nvSpPr>
+          <p:cNvPr id="4" name="Rectangle 3"/>
+          <p:cNvSpPr/>
+          <p:nvPr/>
+        </p:nvSpPr>
+        <p:spPr>
+          <a:xfrm>
+            <a:off x="7277100" y="0"/>
+            <a:ext cx="9525" cy="17145000"/>
+          </a:xfrm>
+          <a:prstGeom prst="rect">
+            <a:avLst/>
+          </a:prstGeom>
+          <a:solidFill>
+            <a:srgbClr val="D9D9D9"/>
+          </a:solidFill>
+          <a:ln>
+            <a:noFill/>
+            <a:prstDash val="dash"/>
+          </a:ln>
+          <a:effectLst/>
+        </p:spPr>
+        <p:style>
+          <a:lnRef idx="1">
+            <a:schemeClr val="accent1"/>
+          </a:lnRef>
+          <a:fillRef idx="3">
+            <a:schemeClr val="accent1"/>
+          </a:fillRef>
+          <a:effectRef idx="2">
+            <a:schemeClr val="accent1"/>
+          </a:effectRef>
+          <a:fontRef idx="minor">
+            <a:schemeClr val="lt1"/>
+          </a:fontRef>
+        </p:style>
+        <p:txBody>
+          <a:bodyPr rtlCol="0" anchor="ctr"/>
+          <a:lstStyle/>
+          <a:p>
+            <a:pPr algn="ctr"/>
+          </a:p>
+        </p:txBody>
+      </p:sp>
+      <p:sp>
+        <p:nvSpPr>
+          <p:cNvPr id="5" name="Rectangle 4"/>
+          <p:cNvSpPr/>
+          <p:nvPr/>
+        </p:nvSpPr>
+        <p:spPr>
+          <a:xfrm>
+            <a:off x="0" y="914400"/>
+            <a:ext cx="7620000" cy="9525"/>
+          </a:xfrm>
+          <a:prstGeom prst="rect">
+            <a:avLst/>
+          </a:prstGeom>
+          <a:solidFill>
+            <a:srgbClr val="D9D9D9"/>
+          </a:solidFill>
+          <a:ln>
+            <a:noFill/>
+            <a:prstDash val="dash"/>
+          </a:ln>
+          <a:effectLst/>
+        </p:spPr>
+        <p:style>
+          <a:lnRef idx="1">
+            <a:schemeClr val="accent1"/>
+          </a:lnRef>
+          <a:fillRef idx="3">
+            <a:schemeClr val="accent1"/>
+          </a:fillRef>
+          <a:effectRef idx="2">
+            <a:schemeClr val="accent1"/>
+          </a:effectRef>
+          <a:fontRef idx="minor">
+            <a:schemeClr val="lt1"/>
+          </a:fontRef>
+        </p:style>
+        <p:txBody>
+          <a:bodyPr rtlCol="0" anchor="ctr"/>
+          <a:lstStyle/>
+          <a:p>
+            <a:pPr algn="ctr"/>
+          </a:p>
+        </p:txBody>
+      </p:sp>
+      <p:sp>
+        <p:nvSpPr>
+          <p:cNvPr id="6" name="TextBox 5"/>
+          <p:cNvSpPr txBox="1"/>
+          <p:nvPr/>
+        </p:nvSpPr>
+        <p:spPr>
+          <a:xfrm>
+            <a:off x="438150" y="152400"/>
+            <a:ext cx="3810000" cy="285750"/>
+          </a:xfrm>
+          <a:prstGeom prst="rect">
+            <a:avLst/>
+          </a:prstGeom>
+          <a:noFill/>
+        </p:spPr>
+        <p:txBody>
+          <a:bodyPr wrap="square" lIns="0" rIns="0" tIns="0" bIns="0">
+            <a:spAutoFit/>
+          </a:bodyPr>
+          <a:lstStyle/>
+          <a:p>
+            <a:pPr algn="l">
+              <a:lnSpc>
+                <a:spcPct val="145000"/>
+              </a:lnSpc>
+            </a:pPr>
+            <a:r>
+              <a:rPr sz="1350" b="0">
+                <a:solidFill>
+                  <a:srgbClr val="A6A6A6"/>
+                </a:solidFill>
+                <a:latin typeface="Menlo"/>
+              </a:rPr>
+              <a:t>36 px</a:t>
+            </a:r>
+          </a:p>
+        </p:txBody>
+      </p:sp>
+      <p:sp>
+        <p:nvSpPr>
+          <p:cNvPr id="7" name="TextBox 6"/>
+          <p:cNvSpPr txBox="1"/>
+          <p:nvPr/>
+        </p:nvSpPr>
+        <p:spPr>
+          <a:xfrm>
+            <a:off x="438150" y="1009650"/>
+            <a:ext cx="3810000" cy="285750"/>
+          </a:xfrm>
+          <a:prstGeom prst="rect">
+            <a:avLst/>
+          </a:prstGeom>
+          <a:noFill/>
+        </p:spPr>
+        <p:txBody>
+          <a:bodyPr wrap="square" lIns="0" rIns="0" tIns="0" bIns="0">
+            <a:spAutoFit/>
+          </a:bodyPr>
+          <a:lstStyle/>
+          <a:p>
+            <a:pPr algn="l">
+              <a:lnSpc>
+                <a:spcPct val="145000"/>
+              </a:lnSpc>
+            </a:pPr>
+            <a:r>
+              <a:rPr sz="1350" b="0">
+                <a:solidFill>
+                  <a:srgbClr val="A6A6A6"/>
+                </a:solidFill>
+                <a:latin typeface="Menlo"/>
+              </a:rPr>
+              <a:t>top bar ends at 96</a:t>
+            </a:r>
+          </a:p>
+        </p:txBody>
+      </p:sp>
+      <p:sp>
+        <p:nvSpPr>
+          <p:cNvPr id="8" name="TextBox 7"/>
+          <p:cNvSpPr txBox="1"/>
+          <p:nvPr/>
+        </p:nvSpPr>
+        <p:spPr>
+          <a:xfrm>
+            <a:off x="342900" y="16230600"/>
+            <a:ext cx="6934200" cy="323850"/>
+          </a:xfrm>
+          <a:prstGeom prst="rect">
+            <a:avLst/>
+          </a:prstGeom>
+          <a:noFill/>
+        </p:spPr>
+        <p:txBody>
+          <a:bodyPr wrap="square" lIns="0" rIns="0" tIns="0" bIns="0">
+            <a:spAutoFit/>
+          </a:bodyPr>
+          <a:lstStyle/>
+          <a:p>
+            <a:pPr algn="l">
+              <a:lnSpc>
+                <a:spcPct val="145000"/>
+              </a:lnSpc>
+            </a:pPr>
+            <a:r>
+              <a:rPr sz="1650" b="0">
+                <a:solidFill>
+                  <a:srgbClr val="A6A6A6"/>
+                </a:solidFill>
+                <a:latin typeface="Menlo"/>
+              </a:rPr>
+              <a:t>15-thread-resume</a:t>
+            </a:r>
+          </a:p>
+        </p:txBody>
+      </p:sp>
+      <p:sp>
+        <p:nvSpPr>
+          <p:cNvPr id="9" name="TextBox 8"/>
+          <p:cNvSpPr txBox="1"/>
+          <p:nvPr/>
+        </p:nvSpPr>
+        <p:spPr>
+          <a:xfrm>
+            <a:off x="342900" y="16554450"/>
+            <a:ext cx="6934200" cy="323850"/>
+          </a:xfrm>
+          <a:prstGeom prst="rect">
+            <a:avLst/>
+          </a:prstGeom>
+          <a:noFill/>
+        </p:spPr>
+        <p:txBody>
+          <a:bodyPr wrap="square" lIns="0" rIns="0" tIns="0" bIns="0">
+            <a:spAutoFit/>
+          </a:bodyPr>
+          <a:lstStyle/>
+          <a:p>
+            <a:pPr algn="l">
+              <a:lnSpc>
+                <a:spcPct val="145000"/>
+              </a:lnSpc>
+            </a:pPr>
+            <a:r>
+              <a:rPr sz="1500" b="0">
+                <a:solidFill>
+                  <a:srgbClr val="A6A6A6"/>
+                </a:solidFill>
+                <a:latin typeface="Helvetica Neue"/>
+              </a:rPr>
+              <a:t>you have been on this site before</a:t>
+            </a:r>
+          </a:p>
+        </p:txBody>
+      </p:sp>
+      <p:sp>
+        <p:nvSpPr>
+          <p:cNvPr id="10" name="TextBox 9"/>
+          <p:cNvSpPr txBox="1"/>
+          <p:nvPr/>
+        </p:nvSpPr>
+        <p:spPr>
+          <a:xfrm>
+            <a:off x="5372100" y="16230600"/>
+            <a:ext cx="1905000" cy="323850"/>
+          </a:xfrm>
+          <a:prstGeom prst="rect">
+            <a:avLst/>
+          </a:prstGeom>
+          <a:noFill/>
+        </p:spPr>
+        <p:txBody>
+          <a:bodyPr wrap="square" lIns="0" rIns="0" tIns="0" bIns="0">
+            <a:spAutoFit/>
+          </a:bodyPr>
+          <a:lstStyle/>
+          <a:p>
+            <a:pPr algn="r">
+              <a:lnSpc>
+                <a:spcPct val="145000"/>
+              </a:lnSpc>
+            </a:pPr>
+            <a:r>
+              <a:rPr sz="1350" b="0">
+                <a:solidFill>
+                  <a:srgbClr val="A6A6A6"/>
+                </a:solidFill>
+                <a:latin typeface="Menlo"/>
+              </a:rPr>
+              <a:t>800 × 1800</a:t>
+            </a:r>
+          </a:p>
+        </p:txBody>
+      </p:sp>
+    </p:spTree>
+  </p:cSld>
+  <p:clrMapOvr>
+    <a:masterClrMapping/>
+  </p:clrMapOvr>
+</p:sld>
+</file>
+
+<file path=ppt/slides/slide18.xml><?xml version="1.0" encoding="utf-8"?>
+<p:sld xmlns:a="http://schemas.openxmlformats.org/drawingml/2006/main" xmlns:p="http://schemas.openxmlformats.org/presentationml/2006/main" xmlns:r="http://schemas.openxmlformats.org/officeDocument/2006/relationships">
+  <p:cSld>
+    <p:spTree>
+      <p:nvGrpSpPr>
+        <p:cNvPr id="1" name=""/>
+        <p:cNvGrpSpPr/>
+        <p:nvPr/>
+      </p:nvGrpSpPr>
+      <p:grpSpPr/>
+      <p:sp>
+        <p:nvSpPr>
+          <p:cNvPr id="2" name="Rectangle 1"/>
+          <p:cNvSpPr/>
+          <p:nvPr/>
+        </p:nvSpPr>
+        <p:spPr>
+          <a:xfrm>
+            <a:off x="0" y="0"/>
+            <a:ext cx="7620000" cy="17145000"/>
+          </a:xfrm>
+          <a:prstGeom prst="rect">
+            <a:avLst/>
+          </a:prstGeom>
+          <a:solidFill>
+            <a:srgbClr val="FFFFFF"/>
+          </a:solidFill>
+          <a:ln>
+            <a:noFill/>
+          </a:ln>
+          <a:effectLst/>
+        </p:spPr>
+        <p:style>
+          <a:lnRef idx="1">
+            <a:schemeClr val="accent1"/>
+          </a:lnRef>
+          <a:fillRef idx="3">
+            <a:schemeClr val="accent1"/>
+          </a:fillRef>
+          <a:effectRef idx="2">
+            <a:schemeClr val="accent1"/>
+          </a:effectRef>
+          <a:fontRef idx="minor">
+            <a:schemeClr val="lt1"/>
+          </a:fontRef>
+        </p:style>
+        <p:txBody>
+          <a:bodyPr rtlCol="0" anchor="ctr"/>
+          <a:lstStyle/>
+          <a:p>
+            <a:pPr algn="ctr"/>
+          </a:p>
+        </p:txBody>
+      </p:sp>
+      <p:sp>
+        <p:nvSpPr>
+          <p:cNvPr id="3" name="Rectangle 2"/>
+          <p:cNvSpPr/>
+          <p:nvPr/>
+        </p:nvSpPr>
+        <p:spPr>
+          <a:xfrm>
+            <a:off x="342900" y="0"/>
+            <a:ext cx="9525" cy="17145000"/>
+          </a:xfrm>
+          <a:prstGeom prst="rect">
+            <a:avLst/>
+          </a:prstGeom>
+          <a:solidFill>
+            <a:srgbClr val="D9D9D9"/>
+          </a:solidFill>
+          <a:ln>
+            <a:noFill/>
+            <a:prstDash val="dash"/>
+          </a:ln>
+          <a:effectLst/>
+        </p:spPr>
+        <p:style>
+          <a:lnRef idx="1">
+            <a:schemeClr val="accent1"/>
+          </a:lnRef>
+          <a:fillRef idx="3">
+            <a:schemeClr val="accent1"/>
+          </a:fillRef>
+          <a:effectRef idx="2">
+            <a:schemeClr val="accent1"/>
+          </a:effectRef>
+          <a:fontRef idx="minor">
+            <a:schemeClr val="lt1"/>
+          </a:fontRef>
+        </p:style>
+        <p:txBody>
+          <a:bodyPr rtlCol="0" anchor="ctr"/>
+          <a:lstStyle/>
+          <a:p>
+            <a:pPr algn="ctr"/>
+          </a:p>
+        </p:txBody>
+      </p:sp>
+      <p:sp>
+        <p:nvSpPr>
+          <p:cNvPr id="4" name="Rectangle 3"/>
+          <p:cNvSpPr/>
+          <p:nvPr/>
+        </p:nvSpPr>
+        <p:spPr>
+          <a:xfrm>
+            <a:off x="7277100" y="0"/>
+            <a:ext cx="9525" cy="17145000"/>
+          </a:xfrm>
+          <a:prstGeom prst="rect">
+            <a:avLst/>
+          </a:prstGeom>
+          <a:solidFill>
+            <a:srgbClr val="D9D9D9"/>
+          </a:solidFill>
+          <a:ln>
+            <a:noFill/>
+            <a:prstDash val="dash"/>
+          </a:ln>
+          <a:effectLst/>
+        </p:spPr>
+        <p:style>
+          <a:lnRef idx="1">
+            <a:schemeClr val="accent1"/>
+          </a:lnRef>
+          <a:fillRef idx="3">
+            <a:schemeClr val="accent1"/>
+          </a:fillRef>
+          <a:effectRef idx="2">
+            <a:schemeClr val="accent1"/>
+          </a:effectRef>
+          <a:fontRef idx="minor">
+            <a:schemeClr val="lt1"/>
+          </a:fontRef>
+        </p:style>
+        <p:txBody>
+          <a:bodyPr rtlCol="0" anchor="ctr"/>
+          <a:lstStyle/>
+          <a:p>
+            <a:pPr algn="ctr"/>
+          </a:p>
+        </p:txBody>
+      </p:sp>
+      <p:sp>
+        <p:nvSpPr>
+          <p:cNvPr id="5" name="Rectangle 4"/>
+          <p:cNvSpPr/>
+          <p:nvPr/>
+        </p:nvSpPr>
+        <p:spPr>
+          <a:xfrm>
+            <a:off x="0" y="914400"/>
+            <a:ext cx="7620000" cy="9525"/>
+          </a:xfrm>
+          <a:prstGeom prst="rect">
+            <a:avLst/>
+          </a:prstGeom>
+          <a:solidFill>
+            <a:srgbClr val="D9D9D9"/>
+          </a:solidFill>
+          <a:ln>
+            <a:noFill/>
+            <a:prstDash val="dash"/>
+          </a:ln>
+          <a:effectLst/>
+        </p:spPr>
+        <p:style>
+          <a:lnRef idx="1">
+            <a:schemeClr val="accent1"/>
+          </a:lnRef>
+          <a:fillRef idx="3">
+            <a:schemeClr val="accent1"/>
+          </a:fillRef>
+          <a:effectRef idx="2">
+            <a:schemeClr val="accent1"/>
+          </a:effectRef>
+          <a:fontRef idx="minor">
+            <a:schemeClr val="lt1"/>
+          </a:fontRef>
+        </p:style>
+        <p:txBody>
+          <a:bodyPr rtlCol="0" anchor="ctr"/>
+          <a:lstStyle/>
+          <a:p>
+            <a:pPr algn="ctr"/>
+          </a:p>
+        </p:txBody>
+      </p:sp>
+      <p:sp>
+        <p:nvSpPr>
+          <p:cNvPr id="6" name="TextBox 5"/>
+          <p:cNvSpPr txBox="1"/>
+          <p:nvPr/>
+        </p:nvSpPr>
+        <p:spPr>
+          <a:xfrm>
+            <a:off x="438150" y="152400"/>
+            <a:ext cx="3810000" cy="285750"/>
+          </a:xfrm>
+          <a:prstGeom prst="rect">
+            <a:avLst/>
+          </a:prstGeom>
+          <a:noFill/>
+        </p:spPr>
+        <p:txBody>
+          <a:bodyPr wrap="square" lIns="0" rIns="0" tIns="0" bIns="0">
+            <a:spAutoFit/>
+          </a:bodyPr>
+          <a:lstStyle/>
+          <a:p>
+            <a:pPr algn="l">
+              <a:lnSpc>
+                <a:spcPct val="145000"/>
+              </a:lnSpc>
+            </a:pPr>
+            <a:r>
+              <a:rPr sz="1350" b="0">
+                <a:solidFill>
+                  <a:srgbClr val="A6A6A6"/>
+                </a:solidFill>
+                <a:latin typeface="Menlo"/>
+              </a:rPr>
+              <a:t>36 px</a:t>
+            </a:r>
+          </a:p>
+        </p:txBody>
+      </p:sp>
+      <p:sp>
+        <p:nvSpPr>
+          <p:cNvPr id="7" name="TextBox 6"/>
+          <p:cNvSpPr txBox="1"/>
+          <p:nvPr/>
+        </p:nvSpPr>
+        <p:spPr>
+          <a:xfrm>
+            <a:off x="438150" y="1009650"/>
+            <a:ext cx="3810000" cy="285750"/>
+          </a:xfrm>
+          <a:prstGeom prst="rect">
+            <a:avLst/>
+          </a:prstGeom>
+          <a:noFill/>
+        </p:spPr>
+        <p:txBody>
+          <a:bodyPr wrap="square" lIns="0" rIns="0" tIns="0" bIns="0">
+            <a:spAutoFit/>
+          </a:bodyPr>
+          <a:lstStyle/>
+          <a:p>
+            <a:pPr algn="l">
+              <a:lnSpc>
+                <a:spcPct val="145000"/>
+              </a:lnSpc>
+            </a:pPr>
+            <a:r>
+              <a:rPr sz="1350" b="0">
+                <a:solidFill>
+                  <a:srgbClr val="A6A6A6"/>
+                </a:solidFill>
+                <a:latin typeface="Menlo"/>
+              </a:rPr>
+              <a:t>top bar ends at 96</a:t>
+            </a:r>
+          </a:p>
+        </p:txBody>
+      </p:sp>
+      <p:sp>
+        <p:nvSpPr>
+          <p:cNvPr id="8" name="TextBox 7"/>
+          <p:cNvSpPr txBox="1"/>
+          <p:nvPr/>
+        </p:nvSpPr>
+        <p:spPr>
+          <a:xfrm>
+            <a:off x="342900" y="16230600"/>
+            <a:ext cx="6934200" cy="323850"/>
+          </a:xfrm>
+          <a:prstGeom prst="rect">
+            <a:avLst/>
+          </a:prstGeom>
+          <a:noFill/>
+        </p:spPr>
+        <p:txBody>
+          <a:bodyPr wrap="square" lIns="0" rIns="0" tIns="0" bIns="0">
+            <a:spAutoFit/>
+          </a:bodyPr>
+          <a:lstStyle/>
+          <a:p>
+            <a:pPr algn="l">
+              <a:lnSpc>
+                <a:spcPct val="145000"/>
+              </a:lnSpc>
+            </a:pPr>
+            <a:r>
+              <a:rPr sz="1650" b="0">
+                <a:solidFill>
+                  <a:srgbClr val="A6A6A6"/>
+                </a:solidFill>
+                <a:latin typeface="Menlo"/>
+              </a:rPr>
+              <a:t>16-thread-new</a:t>
+            </a:r>
+          </a:p>
+        </p:txBody>
+      </p:sp>
+      <p:sp>
+        <p:nvSpPr>
+          <p:cNvPr id="9" name="TextBox 8"/>
+          <p:cNvSpPr txBox="1"/>
+          <p:nvPr/>
+        </p:nvSpPr>
+        <p:spPr>
+          <a:xfrm>
+            <a:off x="342900" y="16554450"/>
+            <a:ext cx="6934200" cy="323850"/>
+          </a:xfrm>
+          <a:prstGeom prst="rect">
+            <a:avLst/>
+          </a:prstGeom>
+          <a:noFill/>
+        </p:spPr>
+        <p:txBody>
+          <a:bodyPr wrap="square" lIns="0" rIns="0" tIns="0" bIns="0">
+            <a:spAutoFit/>
+          </a:bodyPr>
+          <a:lstStyle/>
+          <a:p>
+            <a:pPr algn="l">
+              <a:lnSpc>
+                <a:spcPct val="145000"/>
+              </a:lnSpc>
+            </a:pPr>
+            <a:r>
+              <a:rPr sz="1500" b="0">
+                <a:solidFill>
+                  <a:srgbClr val="A6A6A6"/>
+                </a:solidFill>
+                <a:latin typeface="Helvetica Neue"/>
+              </a:rPr>
+              <a:t>a fresh site, no history</a:t>
+            </a:r>
+          </a:p>
+        </p:txBody>
+      </p:sp>
+      <p:sp>
+        <p:nvSpPr>
+          <p:cNvPr id="10" name="TextBox 9"/>
+          <p:cNvSpPr txBox="1"/>
+          <p:nvPr/>
+        </p:nvSpPr>
+        <p:spPr>
+          <a:xfrm>
+            <a:off x="5372100" y="16230600"/>
+            <a:ext cx="1905000" cy="323850"/>
+          </a:xfrm>
+          <a:prstGeom prst="rect">
+            <a:avLst/>
+          </a:prstGeom>
+          <a:noFill/>
+        </p:spPr>
+        <p:txBody>
+          <a:bodyPr wrap="square" lIns="0" rIns="0" tIns="0" bIns="0">
+            <a:spAutoFit/>
+          </a:bodyPr>
+          <a:lstStyle/>
+          <a:p>
+            <a:pPr algn="r">
+              <a:lnSpc>
+                <a:spcPct val="145000"/>
+              </a:lnSpc>
+            </a:pPr>
+            <a:r>
+              <a:rPr sz="1350" b="0">
+                <a:solidFill>
+                  <a:srgbClr val="A6A6A6"/>
+                </a:solidFill>
+                <a:latin typeface="Menlo"/>
+              </a:rPr>
+              <a:t>800 × 1800</a:t>
+            </a:r>
+          </a:p>
+        </p:txBody>
+      </p:sp>
+    </p:spTree>
+  </p:cSld>
+  <p:clrMapOvr>
+    <a:masterClrMapping/>
+  </p:clrMapOvr>
+</p:sld>
+</file>
+
+<file path=ppt/slides/slide19.xml><?xml version="1.0" encoding="utf-8"?>
+<p:sld xmlns:a="http://schemas.openxmlformats.org/drawingml/2006/main" xmlns:p="http://schemas.openxmlformats.org/presentationml/2006/main" xmlns:r="http://schemas.openxmlformats.org/officeDocument/2006/relationships">
+  <p:cSld>
+    <p:spTree>
+      <p:nvGrpSpPr>
+        <p:cNvPr id="1" name=""/>
+        <p:cNvGrpSpPr/>
+        <p:nvPr/>
+      </p:nvGrpSpPr>
+      <p:grpSpPr/>
+      <p:sp>
+        <p:nvSpPr>
+          <p:cNvPr id="2" name="Rectangle 1"/>
+          <p:cNvSpPr/>
+          <p:nvPr/>
+        </p:nvSpPr>
+        <p:spPr>
+          <a:xfrm>
+            <a:off x="0" y="0"/>
+            <a:ext cx="7620000" cy="17145000"/>
+          </a:xfrm>
+          <a:prstGeom prst="rect">
+            <a:avLst/>
+          </a:prstGeom>
+          <a:solidFill>
+            <a:srgbClr val="FFFFFF"/>
+          </a:solidFill>
+          <a:ln>
+            <a:noFill/>
+          </a:ln>
+          <a:effectLst/>
+        </p:spPr>
+        <p:style>
+          <a:lnRef idx="1">
+            <a:schemeClr val="accent1"/>
+          </a:lnRef>
+          <a:fillRef idx="3">
+            <a:schemeClr val="accent1"/>
+          </a:fillRef>
+          <a:effectRef idx="2">
+            <a:schemeClr val="accent1"/>
+          </a:effectRef>
+          <a:fontRef idx="minor">
+            <a:schemeClr val="lt1"/>
+          </a:fontRef>
+        </p:style>
+        <p:txBody>
+          <a:bodyPr rtlCol="0" anchor="ctr"/>
+          <a:lstStyle/>
+          <a:p>
+            <a:pPr algn="ctr"/>
+          </a:p>
+        </p:txBody>
+      </p:sp>
+      <p:sp>
+        <p:nvSpPr>
+          <p:cNvPr id="3" name="Rectangle 2"/>
+          <p:cNvSpPr/>
+          <p:nvPr/>
+        </p:nvSpPr>
+        <p:spPr>
+          <a:xfrm>
+            <a:off x="342900" y="0"/>
+            <a:ext cx="9525" cy="17145000"/>
+          </a:xfrm>
+          <a:prstGeom prst="rect">
+            <a:avLst/>
+          </a:prstGeom>
+          <a:solidFill>
+            <a:srgbClr val="D9D9D9"/>
+          </a:solidFill>
+          <a:ln>
+            <a:noFill/>
+            <a:prstDash val="dash"/>
+          </a:ln>
+          <a:effectLst/>
+        </p:spPr>
+        <p:style>
+          <a:lnRef idx="1">
+            <a:schemeClr val="accent1"/>
+          </a:lnRef>
+          <a:fillRef idx="3">
+            <a:schemeClr val="accent1"/>
+          </a:fillRef>
+          <a:effectRef idx="2">
+            <a:schemeClr val="accent1"/>
+          </a:effectRef>
+          <a:fontRef idx="minor">
+            <a:schemeClr val="lt1"/>
+          </a:fontRef>
+        </p:style>
+        <p:txBody>
+          <a:bodyPr rtlCol="0" anchor="ctr"/>
+          <a:lstStyle/>
+          <a:p>
+            <a:pPr algn="ctr"/>
+          </a:p>
+        </p:txBody>
+      </p:sp>
+      <p:sp>
+        <p:nvSpPr>
+          <p:cNvPr id="4" name="Rectangle 3"/>
+          <p:cNvSpPr/>
+          <p:nvPr/>
+        </p:nvSpPr>
+        <p:spPr>
+          <a:xfrm>
+            <a:off x="7277100" y="0"/>
+            <a:ext cx="9525" cy="17145000"/>
+          </a:xfrm>
+          <a:prstGeom prst="rect">
+            <a:avLst/>
+          </a:prstGeom>
+          <a:solidFill>
+            <a:srgbClr val="D9D9D9"/>
+          </a:solidFill>
+          <a:ln>
+            <a:noFill/>
+            <a:prstDash val="dash"/>
+          </a:ln>
+          <a:effectLst/>
+        </p:spPr>
+        <p:style>
+          <a:lnRef idx="1">
+            <a:schemeClr val="accent1"/>
+          </a:lnRef>
+          <a:fillRef idx="3">
+            <a:schemeClr val="accent1"/>
+          </a:fillRef>
+          <a:effectRef idx="2">
+            <a:schemeClr val="accent1"/>
+          </a:effectRef>
+          <a:fontRef idx="minor">
+            <a:schemeClr val="lt1"/>
+          </a:fontRef>
+        </p:style>
+        <p:txBody>
+          <a:bodyPr rtlCol="0" anchor="ctr"/>
+          <a:lstStyle/>
+          <a:p>
+            <a:pPr algn="ctr"/>
+          </a:p>
+        </p:txBody>
+      </p:sp>
+      <p:sp>
+        <p:nvSpPr>
+          <p:cNvPr id="5" name="Rectangle 4"/>
+          <p:cNvSpPr/>
+          <p:nvPr/>
+        </p:nvSpPr>
+        <p:spPr>
+          <a:xfrm>
+            <a:off x="0" y="914400"/>
+            <a:ext cx="7620000" cy="9525"/>
+          </a:xfrm>
+          <a:prstGeom prst="rect">
+            <a:avLst/>
+          </a:prstGeom>
+          <a:solidFill>
+            <a:srgbClr val="D9D9D9"/>
+          </a:solidFill>
+          <a:ln>
+            <a:noFill/>
+            <a:prstDash val="dash"/>
+          </a:ln>
+          <a:effectLst/>
+        </p:spPr>
+        <p:style>
+          <a:lnRef idx="1">
+            <a:schemeClr val="accent1"/>
+          </a:lnRef>
+          <a:fillRef idx="3">
+            <a:schemeClr val="accent1"/>
+          </a:fillRef>
+          <a:effectRef idx="2">
+            <a:schemeClr val="accent1"/>
+          </a:effectRef>
+          <a:fontRef idx="minor">
+            <a:schemeClr val="lt1"/>
+          </a:fontRef>
+        </p:style>
+        <p:txBody>
+          <a:bodyPr rtlCol="0" anchor="ctr"/>
+          <a:lstStyle/>
+          <a:p>
+            <a:pPr algn="ctr"/>
+          </a:p>
+        </p:txBody>
+      </p:sp>
+      <p:sp>
+        <p:nvSpPr>
+          <p:cNvPr id="6" name="TextBox 5"/>
+          <p:cNvSpPr txBox="1"/>
+          <p:nvPr/>
+        </p:nvSpPr>
+        <p:spPr>
+          <a:xfrm>
+            <a:off x="438150" y="152400"/>
+            <a:ext cx="3810000" cy="285750"/>
+          </a:xfrm>
+          <a:prstGeom prst="rect">
+            <a:avLst/>
+          </a:prstGeom>
+          <a:noFill/>
+        </p:spPr>
+        <p:txBody>
+          <a:bodyPr wrap="square" lIns="0" rIns="0" tIns="0" bIns="0">
+            <a:spAutoFit/>
+          </a:bodyPr>
+          <a:lstStyle/>
+          <a:p>
+            <a:pPr algn="l">
+              <a:lnSpc>
+                <a:spcPct val="145000"/>
+              </a:lnSpc>
+            </a:pPr>
+            <a:r>
+              <a:rPr sz="1350" b="0">
+                <a:solidFill>
+                  <a:srgbClr val="A6A6A6"/>
+                </a:solidFill>
+                <a:latin typeface="Menlo"/>
+              </a:rPr>
+              <a:t>36 px</a:t>
+            </a:r>
+          </a:p>
+        </p:txBody>
+      </p:sp>
+      <p:sp>
+        <p:nvSpPr>
+          <p:cNvPr id="7" name="TextBox 6"/>
+          <p:cNvSpPr txBox="1"/>
+          <p:nvPr/>
+        </p:nvSpPr>
+        <p:spPr>
+          <a:xfrm>
+            <a:off x="438150" y="1009650"/>
+            <a:ext cx="3810000" cy="285750"/>
+          </a:xfrm>
+          <a:prstGeom prst="rect">
+            <a:avLst/>
+          </a:prstGeom>
+          <a:noFill/>
+        </p:spPr>
+        <p:txBody>
+          <a:bodyPr wrap="square" lIns="0" rIns="0" tIns="0" bIns="0">
+            <a:spAutoFit/>
+          </a:bodyPr>
+          <a:lstStyle/>
+          <a:p>
+            <a:pPr algn="l">
+              <a:lnSpc>
+                <a:spcPct val="145000"/>
+              </a:lnSpc>
+            </a:pPr>
+            <a:r>
+              <a:rPr sz="1350" b="0">
+                <a:solidFill>
+                  <a:srgbClr val="A6A6A6"/>
+                </a:solidFill>
+                <a:latin typeface="Menlo"/>
+              </a:rPr>
+              <a:t>top bar ends at 96</a:t>
+            </a:r>
+          </a:p>
+        </p:txBody>
+      </p:sp>
+      <p:sp>
+        <p:nvSpPr>
+          <p:cNvPr id="8" name="TextBox 7"/>
+          <p:cNvSpPr txBox="1"/>
+          <p:nvPr/>
+        </p:nvSpPr>
+        <p:spPr>
+          <a:xfrm>
+            <a:off x="342900" y="16230600"/>
+            <a:ext cx="6934200" cy="323850"/>
+          </a:xfrm>
+          <a:prstGeom prst="rect">
+            <a:avLst/>
+          </a:prstGeom>
+          <a:noFill/>
+        </p:spPr>
+        <p:txBody>
+          <a:bodyPr wrap="square" lIns="0" rIns="0" tIns="0" bIns="0">
+            <a:spAutoFit/>
+          </a:bodyPr>
+          <a:lstStyle/>
+          <a:p>
+            <a:pPr algn="l">
+              <a:lnSpc>
+                <a:spcPct val="145000"/>
+              </a:lnSpc>
+            </a:pPr>
+            <a:r>
+              <a:rPr sz="1650" b="0">
+                <a:solidFill>
+                  <a:srgbClr val="A6A6A6"/>
+                </a:solidFill>
+                <a:latin typeface="Menlo"/>
+              </a:rPr>
+              <a:t>17-server-came-up</a:t>
+            </a:r>
+          </a:p>
+        </p:txBody>
+      </p:sp>
+      <p:sp>
+        <p:nvSpPr>
+          <p:cNvPr id="9" name="TextBox 8"/>
+          <p:cNvSpPr txBox="1"/>
+          <p:nvPr/>
+        </p:nvSpPr>
+        <p:spPr>
+          <a:xfrm>
+            <a:off x="342900" y="16554450"/>
+            <a:ext cx="6934200" cy="323850"/>
+          </a:xfrm>
+          <a:prstGeom prst="rect">
+            <a:avLst/>
+          </a:prstGeom>
+          <a:noFill/>
+        </p:spPr>
+        <p:txBody>
+          <a:bodyPr wrap="square" lIns="0" rIns="0" tIns="0" bIns="0">
+            <a:spAutoFit/>
+          </a:bodyPr>
+          <a:lstStyle/>
+          <a:p>
+            <a:pPr algn="l">
+              <a:lnSpc>
+                <a:spcPct val="145000"/>
+              </a:lnSpc>
+            </a:pPr>
+            <a:r>
+              <a:rPr sz="1500" b="0">
+                <a:solidFill>
+                  <a:srgbClr val="A6A6A6"/>
+                </a:solidFill>
+                <a:latin typeface="Helvetica Neue"/>
+              </a:rPr>
+              <a:t>it noticed the server start</a:t>
+            </a:r>
+          </a:p>
+        </p:txBody>
+      </p:sp>
+      <p:sp>
+        <p:nvSpPr>
+          <p:cNvPr id="10" name="TextBox 9"/>
+          <p:cNvSpPr txBox="1"/>
+          <p:nvPr/>
+        </p:nvSpPr>
+        <p:spPr>
+          <a:xfrm>
+            <a:off x="5372100" y="16230600"/>
+            <a:ext cx="1905000" cy="323850"/>
+          </a:xfrm>
+          <a:prstGeom prst="rect">
+            <a:avLst/>
+          </a:prstGeom>
+          <a:noFill/>
+        </p:spPr>
+        <p:txBody>
+          <a:bodyPr wrap="square" lIns="0" rIns="0" tIns="0" bIns="0">
+            <a:spAutoFit/>
+          </a:bodyPr>
+          <a:lstStyle/>
+          <a:p>
+            <a:pPr algn="r">
+              <a:lnSpc>
+                <a:spcPct val="145000"/>
+              </a:lnSpc>
+            </a:pPr>
+            <a:r>
+              <a:rPr sz="1350" b="0">
+                <a:solidFill>
+                  <a:srgbClr val="A6A6A6"/>
+                </a:solidFill>
+                <a:latin typeface="Menlo"/>
+              </a:rPr>
+              <a:t>800 × 1800</a:t>
             </a:r>
           </a:p>
         </p:txBody>
@@ -7515,6 +9488,388 @@
                 <a:latin typeface="Menlo"/>
               </a:rPr>
               <a:t>800 × 1800</a:t>
+            </a:r>
+          </a:p>
+        </p:txBody>
+      </p:sp>
+    </p:spTree>
+  </p:cSld>
+  <p:clrMapOvr>
+    <a:masterClrMapping/>
+  </p:clrMapOvr>
+</p:sld>
+</file>
+
+<file path=ppt/slides/slide20.xml><?xml version="1.0" encoding="utf-8"?>
+<p:sld xmlns:a="http://schemas.openxmlformats.org/drawingml/2006/main" xmlns:p="http://schemas.openxmlformats.org/presentationml/2006/main" xmlns:r="http://schemas.openxmlformats.org/officeDocument/2006/relationships">
+  <p:cSld>
+    <p:spTree>
+      <p:nvGrpSpPr>
+        <p:cNvPr id="1" name=""/>
+        <p:cNvGrpSpPr/>
+        <p:nvPr/>
+      </p:nvGrpSpPr>
+      <p:grpSpPr/>
+      <p:sp>
+        <p:nvSpPr>
+          <p:cNvPr id="2" name="Rectangle 1"/>
+          <p:cNvSpPr/>
+          <p:nvPr/>
+        </p:nvSpPr>
+        <p:spPr>
+          <a:xfrm>
+            <a:off x="0" y="0"/>
+            <a:ext cx="7620000" cy="17145000"/>
+          </a:xfrm>
+          <a:prstGeom prst="rect">
+            <a:avLst/>
+          </a:prstGeom>
+          <a:solidFill>
+            <a:srgbClr val="FFFFFF"/>
+          </a:solidFill>
+          <a:ln>
+            <a:noFill/>
+          </a:ln>
+          <a:effectLst/>
+        </p:spPr>
+        <p:style>
+          <a:lnRef idx="1">
+            <a:schemeClr val="accent1"/>
+          </a:lnRef>
+          <a:fillRef idx="3">
+            <a:schemeClr val="accent1"/>
+          </a:fillRef>
+          <a:effectRef idx="2">
+            <a:schemeClr val="accent1"/>
+          </a:effectRef>
+          <a:fontRef idx="minor">
+            <a:schemeClr val="lt1"/>
+          </a:fontRef>
+        </p:style>
+        <p:txBody>
+          <a:bodyPr rtlCol="0" anchor="ctr"/>
+          <a:lstStyle/>
+          <a:p>
+            <a:pPr algn="ctr"/>
+          </a:p>
+        </p:txBody>
+      </p:sp>
+      <p:sp>
+        <p:nvSpPr>
+          <p:cNvPr id="3" name="Rectangle 2"/>
+          <p:cNvSpPr/>
+          <p:nvPr/>
+        </p:nvSpPr>
+        <p:spPr>
+          <a:xfrm>
+            <a:off x="342900" y="0"/>
+            <a:ext cx="9525" cy="17145000"/>
+          </a:xfrm>
+          <a:prstGeom prst="rect">
+            <a:avLst/>
+          </a:prstGeom>
+          <a:solidFill>
+            <a:srgbClr val="D9D9D9"/>
+          </a:solidFill>
+          <a:ln>
+            <a:noFill/>
+            <a:prstDash val="dash"/>
+          </a:ln>
+          <a:effectLst/>
+        </p:spPr>
+        <p:style>
+          <a:lnRef idx="1">
+            <a:schemeClr val="accent1"/>
+          </a:lnRef>
+          <a:fillRef idx="3">
+            <a:schemeClr val="accent1"/>
+          </a:fillRef>
+          <a:effectRef idx="2">
+            <a:schemeClr val="accent1"/>
+          </a:effectRef>
+          <a:fontRef idx="minor">
+            <a:schemeClr val="lt1"/>
+          </a:fontRef>
+        </p:style>
+        <p:txBody>
+          <a:bodyPr rtlCol="0" anchor="ctr"/>
+          <a:lstStyle/>
+          <a:p>
+            <a:pPr algn="ctr"/>
+          </a:p>
+        </p:txBody>
+      </p:sp>
+      <p:sp>
+        <p:nvSpPr>
+          <p:cNvPr id="4" name="Rectangle 3"/>
+          <p:cNvSpPr/>
+          <p:nvPr/>
+        </p:nvSpPr>
+        <p:spPr>
+          <a:xfrm>
+            <a:off x="7277100" y="0"/>
+            <a:ext cx="9525" cy="17145000"/>
+          </a:xfrm>
+          <a:prstGeom prst="rect">
+            <a:avLst/>
+          </a:prstGeom>
+          <a:solidFill>
+            <a:srgbClr val="D9D9D9"/>
+          </a:solidFill>
+          <a:ln>
+            <a:noFill/>
+            <a:prstDash val="dash"/>
+          </a:ln>
+          <a:effectLst/>
+        </p:spPr>
+        <p:style>
+          <a:lnRef idx="1">
+            <a:schemeClr val="accent1"/>
+          </a:lnRef>
+          <a:fillRef idx="3">
+            <a:schemeClr val="accent1"/>
+          </a:fillRef>
+          <a:effectRef idx="2">
+            <a:schemeClr val="accent1"/>
+          </a:effectRef>
+          <a:fontRef idx="minor">
+            <a:schemeClr val="lt1"/>
+          </a:fontRef>
+        </p:style>
+        <p:txBody>
+          <a:bodyPr rtlCol="0" anchor="ctr"/>
+          <a:lstStyle/>
+          <a:p>
+            <a:pPr algn="ctr"/>
+          </a:p>
+        </p:txBody>
+      </p:sp>
+      <p:sp>
+        <p:nvSpPr>
+          <p:cNvPr id="5" name="TextBox 4"/>
+          <p:cNvSpPr txBox="1"/>
+          <p:nvPr/>
+        </p:nvSpPr>
+        <p:spPr>
+          <a:xfrm>
+            <a:off x="342900" y="16230600"/>
+            <a:ext cx="6934200" cy="323850"/>
+          </a:xfrm>
+          <a:prstGeom prst="rect">
+            <a:avLst/>
+          </a:prstGeom>
+          <a:noFill/>
+        </p:spPr>
+        <p:txBody>
+          <a:bodyPr wrap="square" lIns="0" rIns="0" tIns="0" bIns="0">
+            <a:spAutoFit/>
+          </a:bodyPr>
+          <a:lstStyle/>
+          <a:p>
+            <a:pPr algn="l">
+              <a:lnSpc>
+                <a:spcPct val="145000"/>
+              </a:lnSpc>
+            </a:pPr>
+            <a:r>
+              <a:rPr sz="1650" b="0">
+                <a:solidFill>
+                  <a:srgbClr val="A6A6A6"/>
+                </a:solidFill>
+                <a:latin typeface="Menlo"/>
+              </a:rPr>
+              <a:t>spare-1</a:t>
+            </a:r>
+          </a:p>
+        </p:txBody>
+      </p:sp>
+    </p:spTree>
+  </p:cSld>
+  <p:clrMapOvr>
+    <a:masterClrMapping/>
+  </p:clrMapOvr>
+</p:sld>
+</file>
+
+<file path=ppt/slides/slide21.xml><?xml version="1.0" encoding="utf-8"?>
+<p:sld xmlns:a="http://schemas.openxmlformats.org/drawingml/2006/main" xmlns:p="http://schemas.openxmlformats.org/presentationml/2006/main" xmlns:r="http://schemas.openxmlformats.org/officeDocument/2006/relationships">
+  <p:cSld>
+    <p:spTree>
+      <p:nvGrpSpPr>
+        <p:cNvPr id="1" name=""/>
+        <p:cNvGrpSpPr/>
+        <p:nvPr/>
+      </p:nvGrpSpPr>
+      <p:grpSpPr/>
+      <p:sp>
+        <p:nvSpPr>
+          <p:cNvPr id="2" name="Rectangle 1"/>
+          <p:cNvSpPr/>
+          <p:nvPr/>
+        </p:nvSpPr>
+        <p:spPr>
+          <a:xfrm>
+            <a:off x="0" y="0"/>
+            <a:ext cx="7620000" cy="17145000"/>
+          </a:xfrm>
+          <a:prstGeom prst="rect">
+            <a:avLst/>
+          </a:prstGeom>
+          <a:solidFill>
+            <a:srgbClr val="FFFFFF"/>
+          </a:solidFill>
+          <a:ln>
+            <a:noFill/>
+          </a:ln>
+          <a:effectLst/>
+        </p:spPr>
+        <p:style>
+          <a:lnRef idx="1">
+            <a:schemeClr val="accent1"/>
+          </a:lnRef>
+          <a:fillRef idx="3">
+            <a:schemeClr val="accent1"/>
+          </a:fillRef>
+          <a:effectRef idx="2">
+            <a:schemeClr val="accent1"/>
+          </a:effectRef>
+          <a:fontRef idx="minor">
+            <a:schemeClr val="lt1"/>
+          </a:fontRef>
+        </p:style>
+        <p:txBody>
+          <a:bodyPr rtlCol="0" anchor="ctr"/>
+          <a:lstStyle/>
+          <a:p>
+            <a:pPr algn="ctr"/>
+          </a:p>
+        </p:txBody>
+      </p:sp>
+      <p:sp>
+        <p:nvSpPr>
+          <p:cNvPr id="3" name="Rectangle 2"/>
+          <p:cNvSpPr/>
+          <p:nvPr/>
+        </p:nvSpPr>
+        <p:spPr>
+          <a:xfrm>
+            <a:off x="342900" y="0"/>
+            <a:ext cx="9525" cy="17145000"/>
+          </a:xfrm>
+          <a:prstGeom prst="rect">
+            <a:avLst/>
+          </a:prstGeom>
+          <a:solidFill>
+            <a:srgbClr val="D9D9D9"/>
+          </a:solidFill>
+          <a:ln>
+            <a:noFill/>
+            <a:prstDash val="dash"/>
+          </a:ln>
+          <a:effectLst/>
+        </p:spPr>
+        <p:style>
+          <a:lnRef idx="1">
+            <a:schemeClr val="accent1"/>
+          </a:lnRef>
+          <a:fillRef idx="3">
+            <a:schemeClr val="accent1"/>
+          </a:fillRef>
+          <a:effectRef idx="2">
+            <a:schemeClr val="accent1"/>
+          </a:effectRef>
+          <a:fontRef idx="minor">
+            <a:schemeClr val="lt1"/>
+          </a:fontRef>
+        </p:style>
+        <p:txBody>
+          <a:bodyPr rtlCol="0" anchor="ctr"/>
+          <a:lstStyle/>
+          <a:p>
+            <a:pPr algn="ctr"/>
+          </a:p>
+        </p:txBody>
+      </p:sp>
+      <p:sp>
+        <p:nvSpPr>
+          <p:cNvPr id="4" name="Rectangle 3"/>
+          <p:cNvSpPr/>
+          <p:nvPr/>
+        </p:nvSpPr>
+        <p:spPr>
+          <a:xfrm>
+            <a:off x="7277100" y="0"/>
+            <a:ext cx="9525" cy="17145000"/>
+          </a:xfrm>
+          <a:prstGeom prst="rect">
+            <a:avLst/>
+          </a:prstGeom>
+          <a:solidFill>
+            <a:srgbClr val="D9D9D9"/>
+          </a:solidFill>
+          <a:ln>
+            <a:noFill/>
+            <a:prstDash val="dash"/>
+          </a:ln>
+          <a:effectLst/>
+        </p:spPr>
+        <p:style>
+          <a:lnRef idx="1">
+            <a:schemeClr val="accent1"/>
+          </a:lnRef>
+          <a:fillRef idx="3">
+            <a:schemeClr val="accent1"/>
+          </a:fillRef>
+          <a:effectRef idx="2">
+            <a:schemeClr val="accent1"/>
+          </a:effectRef>
+          <a:fontRef idx="minor">
+            <a:schemeClr val="lt1"/>
+          </a:fontRef>
+        </p:style>
+        <p:txBody>
+          <a:bodyPr rtlCol="0" anchor="ctr"/>
+          <a:lstStyle/>
+          <a:p>
+            <a:pPr algn="ctr"/>
+          </a:p>
+        </p:txBody>
+      </p:sp>
+      <p:sp>
+        <p:nvSpPr>
+          <p:cNvPr id="5" name="TextBox 4"/>
+          <p:cNvSpPr txBox="1"/>
+          <p:nvPr/>
+        </p:nvSpPr>
+        <p:spPr>
+          <a:xfrm>
+            <a:off x="342900" y="16230600"/>
+            <a:ext cx="6934200" cy="323850"/>
+          </a:xfrm>
+          <a:prstGeom prst="rect">
+            <a:avLst/>
+          </a:prstGeom>
+          <a:noFill/>
+        </p:spPr>
+        <p:txBody>
+          <a:bodyPr wrap="square" lIns="0" rIns="0" tIns="0" bIns="0">
+            <a:spAutoFit/>
+          </a:bodyPr>
+          <a:lstStyle/>
+          <a:p>
+            <a:pPr algn="l">
+              <a:lnSpc>
+                <a:spcPct val="145000"/>
+              </a:lnSpc>
+            </a:pPr>
+            <a:r>
+              <a:rPr sz="1650" b="0">
+                <a:solidFill>
+                  <a:srgbClr val="A6A6A6"/>
+                </a:solidFill>
+                <a:latin typeface="Menlo"/>
+              </a:rPr>
+              <a:t>spare-2</a:t>
             </a:r>
           </a:p>
         </p:txBody>
